--- a/жильцова презентация.pptx
+++ b/жильцова презентация.pptx
@@ -297,7 +297,7 @@
           <a:p>
             <a:fld id="{3AC261E6-951A-4AB4-9A2E-B77B23D2AFCB}" type="datetimeFigureOut">
               <a:rPr lang="ru-RU" smtClean="0"/>
-              <a:t>04.05.2026</a:t>
+              <a:t>07.06.2026</a:t>
             </a:fld>
             <a:endParaRPr lang="ru-RU"/>
           </a:p>
@@ -467,7 +467,7 @@
           <a:p>
             <a:fld id="{3AC261E6-951A-4AB4-9A2E-B77B23D2AFCB}" type="datetimeFigureOut">
               <a:rPr lang="ru-RU" smtClean="0"/>
-              <a:t>04.05.2026</a:t>
+              <a:t>07.06.2026</a:t>
             </a:fld>
             <a:endParaRPr lang="ru-RU"/>
           </a:p>
@@ -647,7 +647,7 @@
           <a:p>
             <a:fld id="{3AC261E6-951A-4AB4-9A2E-B77B23D2AFCB}" type="datetimeFigureOut">
               <a:rPr lang="ru-RU" smtClean="0"/>
-              <a:t>04.05.2026</a:t>
+              <a:t>07.06.2026</a:t>
             </a:fld>
             <a:endParaRPr lang="ru-RU"/>
           </a:p>
@@ -817,7 +817,7 @@
           <a:p>
             <a:fld id="{3AC261E6-951A-4AB4-9A2E-B77B23D2AFCB}" type="datetimeFigureOut">
               <a:rPr lang="ru-RU" smtClean="0"/>
-              <a:t>04.05.2026</a:t>
+              <a:t>07.06.2026</a:t>
             </a:fld>
             <a:endParaRPr lang="ru-RU"/>
           </a:p>
@@ -1063,7 +1063,7 @@
           <a:p>
             <a:fld id="{3AC261E6-951A-4AB4-9A2E-B77B23D2AFCB}" type="datetimeFigureOut">
               <a:rPr lang="ru-RU" smtClean="0"/>
-              <a:t>04.05.2026</a:t>
+              <a:t>07.06.2026</a:t>
             </a:fld>
             <a:endParaRPr lang="ru-RU"/>
           </a:p>
@@ -1351,7 +1351,7 @@
           <a:p>
             <a:fld id="{3AC261E6-951A-4AB4-9A2E-B77B23D2AFCB}" type="datetimeFigureOut">
               <a:rPr lang="ru-RU" smtClean="0"/>
-              <a:t>04.05.2026</a:t>
+              <a:t>07.06.2026</a:t>
             </a:fld>
             <a:endParaRPr lang="ru-RU"/>
           </a:p>
@@ -1773,7 +1773,7 @@
           <a:p>
             <a:fld id="{3AC261E6-951A-4AB4-9A2E-B77B23D2AFCB}" type="datetimeFigureOut">
               <a:rPr lang="ru-RU" smtClean="0"/>
-              <a:t>04.05.2026</a:t>
+              <a:t>07.06.2026</a:t>
             </a:fld>
             <a:endParaRPr lang="ru-RU"/>
           </a:p>
@@ -1891,7 +1891,7 @@
           <a:p>
             <a:fld id="{3AC261E6-951A-4AB4-9A2E-B77B23D2AFCB}" type="datetimeFigureOut">
               <a:rPr lang="ru-RU" smtClean="0"/>
-              <a:t>04.05.2026</a:t>
+              <a:t>07.06.2026</a:t>
             </a:fld>
             <a:endParaRPr lang="ru-RU"/>
           </a:p>
@@ -1986,7 +1986,7 @@
           <a:p>
             <a:fld id="{3AC261E6-951A-4AB4-9A2E-B77B23D2AFCB}" type="datetimeFigureOut">
               <a:rPr lang="ru-RU" smtClean="0"/>
-              <a:t>04.05.2026</a:t>
+              <a:t>07.06.2026</a:t>
             </a:fld>
             <a:endParaRPr lang="ru-RU"/>
           </a:p>
@@ -2263,7 +2263,7 @@
           <a:p>
             <a:fld id="{3AC261E6-951A-4AB4-9A2E-B77B23D2AFCB}" type="datetimeFigureOut">
               <a:rPr lang="ru-RU" smtClean="0"/>
-              <a:t>04.05.2026</a:t>
+              <a:t>07.06.2026</a:t>
             </a:fld>
             <a:endParaRPr lang="ru-RU"/>
           </a:p>
@@ -2516,7 +2516,7 @@
           <a:p>
             <a:fld id="{3AC261E6-951A-4AB4-9A2E-B77B23D2AFCB}" type="datetimeFigureOut">
               <a:rPr lang="ru-RU" smtClean="0"/>
-              <a:t>04.05.2026</a:t>
+              <a:t>07.06.2026</a:t>
             </a:fld>
             <a:endParaRPr lang="ru-RU"/>
           </a:p>
@@ -2729,7 +2729,7 @@
           <a:p>
             <a:fld id="{3AC261E6-951A-4AB4-9A2E-B77B23D2AFCB}" type="datetimeFigureOut">
               <a:rPr lang="ru-RU" smtClean="0"/>
-              <a:t>04.05.2026</a:t>
+              <a:t>07.06.2026</a:t>
             </a:fld>
             <a:endParaRPr lang="ru-RU"/>
           </a:p>
@@ -3586,7 +3586,12 @@
             <p:ph type="title"/>
           </p:nvPr>
         </p:nvSpPr>
-        <p:spPr/>
+        <p:spPr>
+          <a:xfrm>
+            <a:off x="398712" y="0"/>
+            <a:ext cx="8229600" cy="1143000"/>
+          </a:xfrm>
+        </p:spPr>
         <p:txBody>
           <a:bodyPr>
             <a:normAutofit/>
@@ -3624,10 +3629,15 @@
             <p:ph idx="1"/>
           </p:nvPr>
         </p:nvSpPr>
-        <p:spPr/>
+        <p:spPr>
+          <a:xfrm>
+            <a:off x="251520" y="836712"/>
+            <a:ext cx="4392488" cy="5145435"/>
+          </a:xfrm>
+        </p:spPr>
         <p:txBody>
           <a:bodyPr>
-            <a:normAutofit fontScale="70000" lnSpcReduction="20000"/>
+            <a:noAutofit/>
           </a:bodyPr>
           <a:lstStyle/>
           <a:p>
@@ -3635,292 +3645,287 @@
               <a:buNone/>
             </a:pPr>
             <a:r>
-              <a:rPr lang="ru-RU" b="1" dirty="0">
+              <a:rPr lang="ru-RU" sz="2400" b="1" dirty="0">
                 <a:latin typeface="Times New Roman" pitchFamily="18" charset="0"/>
                 <a:cs typeface="Times New Roman" pitchFamily="18" charset="0"/>
               </a:rPr>
               <a:t>Команда </a:t>
             </a:r>
             <a:r>
-              <a:rPr lang="ru-RU" b="1" dirty="0" smtClean="0">
+              <a:rPr lang="ru-RU" sz="2400" b="1" dirty="0" smtClean="0">
                 <a:latin typeface="Times New Roman" pitchFamily="18" charset="0"/>
                 <a:cs typeface="Times New Roman" pitchFamily="18" charset="0"/>
               </a:rPr>
               <a:t>проекта</a:t>
             </a:r>
-            <a:endParaRPr lang="ru-RU" dirty="0">
+            <a:endParaRPr lang="ru-RU" sz="2400" dirty="0">
               <a:latin typeface="Times New Roman" pitchFamily="18" charset="0"/>
               <a:cs typeface="Times New Roman" pitchFamily="18" charset="0"/>
             </a:endParaRPr>
           </a:p>
           <a:p>
             <a:r>
-              <a:rPr lang="ru-RU" dirty="0">
-                <a:latin typeface="Times New Roman" pitchFamily="18" charset="0"/>
-                <a:cs typeface="Times New Roman" pitchFamily="18" charset="0"/>
-              </a:rPr>
-              <a:t>Геймдизайнер / </a:t>
-            </a:r>
-            <a:r>
-              <a:rPr lang="ru-RU" dirty="0" smtClean="0">
-                <a:latin typeface="Times New Roman" pitchFamily="18" charset="0"/>
-                <a:cs typeface="Times New Roman" pitchFamily="18" charset="0"/>
-              </a:rPr>
-              <a:t>Продюсер</a:t>
-            </a:r>
-          </a:p>
-          <a:p>
-            <a:r>
-              <a:rPr lang="ru-RU" dirty="0" smtClean="0">
-                <a:latin typeface="Times New Roman" pitchFamily="18" charset="0"/>
-                <a:cs typeface="Times New Roman" pitchFamily="18" charset="0"/>
-              </a:rPr>
-              <a:t>Программист </a:t>
-            </a:r>
-            <a:r>
-              <a:rPr lang="ru-RU" dirty="0">
-                <a:latin typeface="Times New Roman" pitchFamily="18" charset="0"/>
-                <a:cs typeface="Times New Roman" pitchFamily="18" charset="0"/>
-              </a:rPr>
-              <a:t>(</a:t>
-            </a:r>
-            <a:r>
-              <a:rPr lang="en-US" dirty="0" err="1">
-                <a:latin typeface="Times New Roman" pitchFamily="18" charset="0"/>
-                <a:cs typeface="Times New Roman" pitchFamily="18" charset="0"/>
-              </a:rPr>
-              <a:t>Godot</a:t>
-            </a:r>
-            <a:r>
-              <a:rPr lang="en-US" dirty="0">
-                <a:latin typeface="Times New Roman" pitchFamily="18" charset="0"/>
-                <a:cs typeface="Times New Roman" pitchFamily="18" charset="0"/>
-              </a:rPr>
-              <a:t>/</a:t>
-            </a:r>
-            <a:r>
-              <a:rPr lang="en-US" dirty="0" err="1">
-                <a:latin typeface="Times New Roman" pitchFamily="18" charset="0"/>
-                <a:cs typeface="Times New Roman" pitchFamily="18" charset="0"/>
-              </a:rPr>
-              <a:t>GDScript</a:t>
-            </a:r>
-            <a:r>
-              <a:rPr lang="en-US" dirty="0">
-                <a:latin typeface="Times New Roman" pitchFamily="18" charset="0"/>
-                <a:cs typeface="Times New Roman" pitchFamily="18" charset="0"/>
-              </a:rPr>
-              <a:t>)</a:t>
-            </a:r>
-          </a:p>
-          <a:p>
-            <a:r>
-              <a:rPr lang="en-US" dirty="0">
-                <a:latin typeface="Times New Roman" pitchFamily="18" charset="0"/>
-                <a:cs typeface="Times New Roman" pitchFamily="18" charset="0"/>
-              </a:rPr>
-              <a:t>2D-</a:t>
-            </a:r>
-            <a:r>
-              <a:rPr lang="ru-RU" dirty="0">
-                <a:latin typeface="Times New Roman" pitchFamily="18" charset="0"/>
-                <a:cs typeface="Times New Roman" pitchFamily="18" charset="0"/>
-              </a:rPr>
-              <a:t>Художник (атмосфера, персонажи, </a:t>
-            </a:r>
-            <a:r>
-              <a:rPr lang="en-US" dirty="0">
-                <a:latin typeface="Times New Roman" pitchFamily="18" charset="0"/>
-                <a:cs typeface="Times New Roman" pitchFamily="18" charset="0"/>
-              </a:rPr>
-              <a:t>UI)</a:t>
-            </a:r>
-          </a:p>
-          <a:p>
-            <a:r>
-              <a:rPr lang="ru-RU" dirty="0">
-                <a:latin typeface="Times New Roman" pitchFamily="18" charset="0"/>
-                <a:cs typeface="Times New Roman" pitchFamily="18" charset="0"/>
-              </a:rPr>
-              <a:t>Сценарист (диалоги, лор)</a:t>
-            </a:r>
-          </a:p>
-          <a:p>
-            <a:r>
-              <a:rPr lang="ru-RU" dirty="0">
-                <a:latin typeface="Times New Roman" pitchFamily="18" charset="0"/>
-                <a:cs typeface="Times New Roman" pitchFamily="18" charset="0"/>
-              </a:rPr>
-              <a:t>Саунд-дизайнер (музыка, </a:t>
-            </a:r>
-            <a:r>
-              <a:rPr lang="ru-RU" dirty="0" smtClean="0">
-                <a:latin typeface="Times New Roman" pitchFamily="18" charset="0"/>
-                <a:cs typeface="Times New Roman" pitchFamily="18" charset="0"/>
-              </a:rPr>
-              <a:t>звуки)</a:t>
-            </a:r>
-            <a:endParaRPr lang="ru-RU" dirty="0">
+              <a:rPr lang="ru-RU" sz="2400" dirty="0" smtClean="0">
+                <a:latin typeface="Times New Roman" pitchFamily="18" charset="0"/>
+                <a:cs typeface="Times New Roman" pitchFamily="18" charset="0"/>
+              </a:rPr>
+              <a:t>Геймдизайнер</a:t>
+            </a:r>
+          </a:p>
+          <a:p>
+            <a:r>
+              <a:rPr lang="ru-RU" sz="2400" dirty="0" smtClean="0">
+                <a:latin typeface="Times New Roman" pitchFamily="18" charset="0"/>
+                <a:cs typeface="Times New Roman" pitchFamily="18" charset="0"/>
+              </a:rPr>
+              <a:t>Программист</a:t>
+            </a:r>
+            <a:endParaRPr lang="en-US" sz="2400" dirty="0">
               <a:latin typeface="Times New Roman" pitchFamily="18" charset="0"/>
               <a:cs typeface="Times New Roman" pitchFamily="18" charset="0"/>
             </a:endParaRPr>
           </a:p>
           <a:p>
             <a:r>
-              <a:rPr lang="ru-RU" dirty="0" err="1">
-                <a:latin typeface="Times New Roman" pitchFamily="18" charset="0"/>
-                <a:cs typeface="Times New Roman" pitchFamily="18" charset="0"/>
-              </a:rPr>
-              <a:t>Тестировщик</a:t>
-            </a:r>
-            <a:endParaRPr lang="ru-RU" dirty="0">
+              <a:rPr lang="en-US" sz="2400" dirty="0">
+                <a:latin typeface="Times New Roman" pitchFamily="18" charset="0"/>
+                <a:cs typeface="Times New Roman" pitchFamily="18" charset="0"/>
+              </a:rPr>
+              <a:t>2D-</a:t>
+            </a:r>
+            <a:r>
+              <a:rPr lang="ru-RU" sz="2400" dirty="0" smtClean="0">
+                <a:latin typeface="Times New Roman" pitchFamily="18" charset="0"/>
+                <a:cs typeface="Times New Roman" pitchFamily="18" charset="0"/>
+              </a:rPr>
+              <a:t>Художник</a:t>
+            </a:r>
+            <a:endParaRPr lang="en-US" sz="2400" dirty="0">
               <a:latin typeface="Times New Roman" pitchFamily="18" charset="0"/>
               <a:cs typeface="Times New Roman" pitchFamily="18" charset="0"/>
             </a:endParaRPr>
           </a:p>
           <a:p>
-            <a:pPr marL="0" indent="0">
-              <a:buNone/>
-            </a:pPr>
-            <a:r>
-              <a:rPr lang="ru-RU" b="1" dirty="0">
-                <a:latin typeface="Times New Roman" pitchFamily="18" charset="0"/>
-                <a:cs typeface="Times New Roman" pitchFamily="18" charset="0"/>
-              </a:rPr>
-              <a:t>Технологии</a:t>
-            </a:r>
-            <a:r>
-              <a:rPr lang="ru-RU" dirty="0">
-                <a:latin typeface="Times New Roman" pitchFamily="18" charset="0"/>
-                <a:cs typeface="Times New Roman" pitchFamily="18" charset="0"/>
-              </a:rPr>
-              <a:t>:</a:t>
-            </a:r>
-          </a:p>
-          <a:p>
-            <a:r>
-              <a:rPr lang="ru-RU" dirty="0">
-                <a:latin typeface="Times New Roman" pitchFamily="18" charset="0"/>
-                <a:cs typeface="Times New Roman" pitchFamily="18" charset="0"/>
-              </a:rPr>
-              <a:t>Движок: </a:t>
-            </a:r>
-            <a:r>
-              <a:rPr lang="en-US" dirty="0" err="1">
-                <a:latin typeface="Times New Roman" pitchFamily="18" charset="0"/>
-                <a:cs typeface="Times New Roman" pitchFamily="18" charset="0"/>
-              </a:rPr>
-              <a:t>Godot</a:t>
-            </a:r>
-            <a:r>
-              <a:rPr lang="en-US" dirty="0">
-                <a:latin typeface="Times New Roman" pitchFamily="18" charset="0"/>
-                <a:cs typeface="Times New Roman" pitchFamily="18" charset="0"/>
-              </a:rPr>
-              <a:t> </a:t>
-            </a:r>
-            <a:r>
-              <a:rPr lang="en-US" dirty="0" smtClean="0">
-                <a:latin typeface="Times New Roman" pitchFamily="18" charset="0"/>
-                <a:cs typeface="Times New Roman" pitchFamily="18" charset="0"/>
-              </a:rPr>
-              <a:t>4.x</a:t>
-            </a:r>
-            <a:endParaRPr lang="ru-RU" dirty="0">
+            <a:r>
+              <a:rPr lang="ru-RU" sz="2400" dirty="0" smtClean="0">
+                <a:latin typeface="Times New Roman" pitchFamily="18" charset="0"/>
+                <a:cs typeface="Times New Roman" pitchFamily="18" charset="0"/>
+              </a:rPr>
+              <a:t>Сценарист</a:t>
+            </a:r>
+            <a:endParaRPr lang="ru-RU" sz="2400" dirty="0">
               <a:latin typeface="Times New Roman" pitchFamily="18" charset="0"/>
               <a:cs typeface="Times New Roman" pitchFamily="18" charset="0"/>
             </a:endParaRPr>
           </a:p>
           <a:p>
             <a:r>
-              <a:rPr lang="ru-RU" dirty="0">
-                <a:latin typeface="Times New Roman" pitchFamily="18" charset="0"/>
-                <a:cs typeface="Times New Roman" pitchFamily="18" charset="0"/>
-              </a:rPr>
-              <a:t>Графика: </a:t>
-            </a:r>
-            <a:r>
-              <a:rPr lang="en-US" dirty="0" err="1" smtClean="0">
-                <a:latin typeface="Times New Roman" pitchFamily="18" charset="0"/>
-                <a:cs typeface="Times New Roman" pitchFamily="18" charset="0"/>
-              </a:rPr>
-              <a:t>Krita</a:t>
-            </a:r>
-            <a:endParaRPr lang="en-US" dirty="0">
+              <a:rPr lang="ru-RU" sz="2400" dirty="0" smtClean="0">
+                <a:latin typeface="Times New Roman" pitchFamily="18" charset="0"/>
+                <a:cs typeface="Times New Roman" pitchFamily="18" charset="0"/>
+              </a:rPr>
+              <a:t>Саунд-дизайнер</a:t>
+            </a:r>
+          </a:p>
+          <a:p>
+            <a:r>
+              <a:rPr lang="ru-RU" sz="2400" dirty="0" err="1" smtClean="0">
+                <a:latin typeface="Times New Roman" pitchFamily="18" charset="0"/>
+                <a:cs typeface="Times New Roman" pitchFamily="18" charset="0"/>
+              </a:rPr>
+              <a:t>Тестировщик</a:t>
+            </a:r>
+            <a:endParaRPr lang="ru-RU" sz="2400" dirty="0" smtClean="0">
               <a:latin typeface="Times New Roman" pitchFamily="18" charset="0"/>
               <a:cs typeface="Times New Roman" pitchFamily="18" charset="0"/>
             </a:endParaRPr>
           </a:p>
           <a:p>
-            <a:r>
-              <a:rPr lang="ru-RU" dirty="0">
-                <a:latin typeface="Times New Roman" pitchFamily="18" charset="0"/>
-                <a:cs typeface="Times New Roman" pitchFamily="18" charset="0"/>
-              </a:rPr>
-              <a:t>Звук: </a:t>
-            </a:r>
-            <a:r>
-              <a:rPr lang="en-US" dirty="0" smtClean="0">
-                <a:latin typeface="Times New Roman" pitchFamily="18" charset="0"/>
-                <a:cs typeface="Times New Roman" pitchFamily="18" charset="0"/>
-              </a:rPr>
-              <a:t>Audacity</a:t>
-            </a:r>
-            <a:endParaRPr lang="en-US" dirty="0">
+            <a:pPr marL="0" indent="0">
+              <a:buNone/>
+            </a:pPr>
+            <a:r>
+              <a:rPr lang="ru-RU" sz="2400" b="1" dirty="0" smtClean="0">
+                <a:latin typeface="Times New Roman" pitchFamily="18" charset="0"/>
+                <a:cs typeface="Times New Roman" pitchFamily="18" charset="0"/>
+              </a:rPr>
+              <a:t>Технологии</a:t>
+            </a:r>
+            <a:r>
+              <a:rPr lang="ru-RU" sz="2400" dirty="0">
+                <a:latin typeface="Times New Roman" pitchFamily="18" charset="0"/>
+                <a:cs typeface="Times New Roman" pitchFamily="18" charset="0"/>
+              </a:rPr>
+              <a:t>:</a:t>
+            </a:r>
+          </a:p>
+          <a:p>
+            <a:r>
+              <a:rPr lang="ru-RU" sz="2400" dirty="0">
+                <a:latin typeface="Times New Roman" pitchFamily="18" charset="0"/>
+                <a:cs typeface="Times New Roman" pitchFamily="18" charset="0"/>
+              </a:rPr>
+              <a:t>Движок: </a:t>
+            </a:r>
+            <a:r>
+              <a:rPr lang="en-US" sz="2400" dirty="0" err="1" smtClean="0">
+                <a:latin typeface="Times New Roman" pitchFamily="18" charset="0"/>
+                <a:cs typeface="Times New Roman" pitchFamily="18" charset="0"/>
+              </a:rPr>
+              <a:t>Godot</a:t>
+            </a:r>
+            <a:endParaRPr lang="ru-RU" sz="2400" dirty="0">
               <a:latin typeface="Times New Roman" pitchFamily="18" charset="0"/>
               <a:cs typeface="Times New Roman" pitchFamily="18" charset="0"/>
             </a:endParaRPr>
           </a:p>
           <a:p>
             <a:r>
-              <a:rPr lang="ru-RU" dirty="0">
-                <a:latin typeface="Times New Roman" pitchFamily="18" charset="0"/>
-                <a:cs typeface="Times New Roman" pitchFamily="18" charset="0"/>
-              </a:rPr>
-              <a:t>Платформы дистрибуции: </a:t>
-            </a:r>
-            <a:r>
-              <a:rPr lang="en-US" dirty="0">
-                <a:latin typeface="Times New Roman" pitchFamily="18" charset="0"/>
-                <a:cs typeface="Times New Roman" pitchFamily="18" charset="0"/>
-              </a:rPr>
-              <a:t>Steam (30% </a:t>
-            </a:r>
-            <a:r>
-              <a:rPr lang="ru-RU" dirty="0">
-                <a:latin typeface="Times New Roman" pitchFamily="18" charset="0"/>
-                <a:cs typeface="Times New Roman" pitchFamily="18" charset="0"/>
-              </a:rPr>
-              <a:t>комиссия), </a:t>
-            </a:r>
-            <a:r>
-              <a:rPr lang="en-US" dirty="0">
-                <a:latin typeface="Times New Roman" pitchFamily="18" charset="0"/>
-                <a:cs typeface="Times New Roman" pitchFamily="18" charset="0"/>
-              </a:rPr>
-              <a:t>VK Play (5% </a:t>
-            </a:r>
-            <a:r>
-              <a:rPr lang="ru-RU" dirty="0">
-                <a:latin typeface="Times New Roman" pitchFamily="18" charset="0"/>
-                <a:cs typeface="Times New Roman" pitchFamily="18" charset="0"/>
-              </a:rPr>
-              <a:t>комиссия</a:t>
-            </a:r>
-            <a:r>
-              <a:rPr lang="ru-RU" dirty="0" smtClean="0">
-                <a:latin typeface="Times New Roman" pitchFamily="18" charset="0"/>
-                <a:cs typeface="Times New Roman" pitchFamily="18" charset="0"/>
-              </a:rPr>
-              <a:t>)</a:t>
-            </a:r>
-            <a:endParaRPr lang="ru-RU" dirty="0">
+              <a:rPr lang="ru-RU" sz="2400" dirty="0">
+                <a:latin typeface="Times New Roman" pitchFamily="18" charset="0"/>
+                <a:cs typeface="Times New Roman" pitchFamily="18" charset="0"/>
+              </a:rPr>
+              <a:t>Графика: </a:t>
+            </a:r>
+            <a:r>
+              <a:rPr lang="en-US" sz="2400" dirty="0" err="1" smtClean="0">
+                <a:latin typeface="Times New Roman" pitchFamily="18" charset="0"/>
+                <a:cs typeface="Times New Roman" pitchFamily="18" charset="0"/>
+              </a:rPr>
+              <a:t>Krita</a:t>
+            </a:r>
+            <a:endParaRPr lang="en-US" sz="2400" dirty="0">
               <a:latin typeface="Times New Roman" pitchFamily="18" charset="0"/>
               <a:cs typeface="Times New Roman" pitchFamily="18" charset="0"/>
             </a:endParaRPr>
           </a:p>
           <a:p>
-            <a:endParaRPr lang="ru-RU" dirty="0"/>
+            <a:r>
+              <a:rPr lang="ru-RU" sz="2400" dirty="0">
+                <a:latin typeface="Times New Roman" pitchFamily="18" charset="0"/>
+                <a:cs typeface="Times New Roman" pitchFamily="18" charset="0"/>
+              </a:rPr>
+              <a:t>Звук: </a:t>
+            </a:r>
+            <a:r>
+              <a:rPr lang="en-US" sz="2400" dirty="0" smtClean="0">
+                <a:latin typeface="Times New Roman" pitchFamily="18" charset="0"/>
+                <a:cs typeface="Times New Roman" pitchFamily="18" charset="0"/>
+              </a:rPr>
+              <a:t>Audacity</a:t>
+            </a:r>
+            <a:endParaRPr lang="en-US" sz="2400" dirty="0">
+              <a:latin typeface="Times New Roman" pitchFamily="18" charset="0"/>
+              <a:cs typeface="Times New Roman" pitchFamily="18" charset="0"/>
+            </a:endParaRPr>
+          </a:p>
+          <a:p>
+            <a:r>
+              <a:rPr lang="ru-RU" sz="2400" dirty="0">
+                <a:latin typeface="Times New Roman" pitchFamily="18" charset="0"/>
+                <a:cs typeface="Times New Roman" pitchFamily="18" charset="0"/>
+              </a:rPr>
+              <a:t>Платформы </a:t>
+            </a:r>
+            <a:r>
+              <a:rPr lang="ru-RU" sz="2400" dirty="0" smtClean="0">
+                <a:latin typeface="Times New Roman" pitchFamily="18" charset="0"/>
+                <a:cs typeface="Times New Roman" pitchFamily="18" charset="0"/>
+              </a:rPr>
+              <a:t>дистрибуции</a:t>
+            </a:r>
+            <a:r>
+              <a:rPr lang="ru-RU" sz="2400" dirty="0">
+                <a:latin typeface="Times New Roman" pitchFamily="18" charset="0"/>
+                <a:cs typeface="Times New Roman" pitchFamily="18" charset="0"/>
+              </a:rPr>
+              <a:t>: </a:t>
+            </a:r>
+            <a:r>
+              <a:rPr lang="en-US" sz="2400" dirty="0" smtClean="0">
+                <a:latin typeface="Times New Roman" pitchFamily="18" charset="0"/>
+                <a:cs typeface="Times New Roman" pitchFamily="18" charset="0"/>
+              </a:rPr>
+              <a:t>Steam</a:t>
+            </a:r>
+            <a:r>
+              <a:rPr lang="ru-RU" sz="2400" dirty="0" smtClean="0">
+                <a:latin typeface="Times New Roman" pitchFamily="18" charset="0"/>
+                <a:cs typeface="Times New Roman" pitchFamily="18" charset="0"/>
+              </a:rPr>
+              <a:t>, </a:t>
+            </a:r>
+            <a:r>
+              <a:rPr lang="en-US" sz="2400" dirty="0">
+                <a:latin typeface="Times New Roman" pitchFamily="18" charset="0"/>
+                <a:cs typeface="Times New Roman" pitchFamily="18" charset="0"/>
+              </a:rPr>
+              <a:t>VK </a:t>
+            </a:r>
+            <a:r>
+              <a:rPr lang="en-US" sz="2400" dirty="0" smtClean="0">
+                <a:latin typeface="Times New Roman" pitchFamily="18" charset="0"/>
+                <a:cs typeface="Times New Roman" pitchFamily="18" charset="0"/>
+              </a:rPr>
+              <a:t>Play</a:t>
+            </a:r>
+            <a:endParaRPr lang="ru-RU" sz="2400" dirty="0"/>
+          </a:p>
+        </p:txBody>
+      </p:sp>
+      <p:sp>
+        <p:nvSpPr>
+          <p:cNvPr id="4" name="Скругленный прямоугольник 3"/>
+          <p:cNvSpPr/>
+          <p:nvPr/>
+        </p:nvSpPr>
+        <p:spPr>
+          <a:xfrm>
+            <a:off x="3707904" y="1052736"/>
+            <a:ext cx="5040560" cy="4657039"/>
+          </a:xfrm>
+          <a:prstGeom prst="roundRect">
+            <a:avLst/>
+          </a:prstGeom>
+          <a:blipFill dpi="0" rotWithShape="1">
+            <a:blip r:embed="rId2">
+              <a:extLst>
+                <a:ext uri="{28A0092B-C50C-407E-A947-70E740481C1C}">
+                  <a14:useLocalDpi xmlns:a14="http://schemas.microsoft.com/office/drawing/2010/main" val="0"/>
+                </a:ext>
+              </a:extLst>
+            </a:blip>
+            <a:srcRect/>
+            <a:stretch>
+              <a:fillRect/>
+            </a:stretch>
+          </a:blipFill>
+          <a:ln>
+            <a:noFill/>
+          </a:ln>
+        </p:spPr>
+        <p:style>
+          <a:lnRef idx="2">
+            <a:schemeClr val="accent1">
+              <a:shade val="50000"/>
+            </a:schemeClr>
+          </a:lnRef>
+          <a:fillRef idx="1">
+            <a:schemeClr val="accent1"/>
+          </a:fillRef>
+          <a:effectRef idx="0">
+            <a:schemeClr val="accent1"/>
+          </a:effectRef>
+          <a:fontRef idx="minor">
+            <a:schemeClr val="lt1"/>
+          </a:fontRef>
+        </p:style>
+        <p:txBody>
+          <a:bodyPr rtlCol="0" anchor="ctr"/>
+          <a:lstStyle/>
+          <a:p>
+            <a:pPr algn="ctr"/>
+            <a:endParaRPr lang="ru-RU"/>
           </a:p>
         </p:txBody>
       </p:sp>
@@ -4055,7 +4060,21 @@
                 <a:latin typeface="Times New Roman" pitchFamily="18" charset="0"/>
                 <a:cs typeface="Times New Roman" pitchFamily="18" charset="0"/>
               </a:rPr>
-              <a:t>Жанр: Фермерский симулятор, RPG с элементами ведьмовства и симуляции жизни</a:t>
+              <a:t>Жанр: </a:t>
+            </a:r>
+            <a:r>
+              <a:rPr lang="ru-RU" sz="2000" dirty="0" smtClean="0">
+                <a:latin typeface="Times New Roman" pitchFamily="18" charset="0"/>
+                <a:cs typeface="Times New Roman" pitchFamily="18" charset="0"/>
+              </a:rPr>
+              <a:t>Фермерская </a:t>
+            </a:r>
+            <a:r>
+              <a:rPr lang="ru-RU" sz="2000" dirty="0" smtClean="0">
+                <a:latin typeface="Times New Roman" pitchFamily="18" charset="0"/>
+                <a:cs typeface="Times New Roman" pitchFamily="18" charset="0"/>
+              </a:rPr>
+              <a:t>ролевая игра с элементами колдовства</a:t>
             </a:r>
           </a:p>
           <a:p>
@@ -4071,7 +4090,7 @@
                 <a:latin typeface="Times New Roman" pitchFamily="18" charset="0"/>
                 <a:cs typeface="Times New Roman" pitchFamily="18" charset="0"/>
               </a:rPr>
-              <a:t>: Британская сельская глубинка. Мир, где лес чувствует и помнит, а магия переплетена с повседневным бытом деревенской ведьмы.</a:t>
+              <a:t>: Сельская глубинка с шумной и светлой деревушкой, вересковые поля, мрачный лес и уютный дом ведьмы</a:t>
             </a:r>
           </a:p>
           <a:p>
@@ -4207,7 +4226,12 @@
             <p:ph type="title"/>
           </p:nvPr>
         </p:nvSpPr>
-        <p:spPr/>
+        <p:spPr>
+          <a:xfrm>
+            <a:off x="3857624" y="274638"/>
+            <a:ext cx="4829175" cy="1143000"/>
+          </a:xfrm>
+        </p:spPr>
         <p:txBody>
           <a:bodyPr>
             <a:normAutofit/>
@@ -4215,18 +4239,11 @@
           <a:lstStyle/>
           <a:p>
             <a:r>
-              <a:rPr lang="ru-RU" sz="2800" dirty="0" err="1" smtClean="0">
-                <a:latin typeface="Times New Roman" pitchFamily="18" charset="0"/>
-                <a:cs typeface="Times New Roman" pitchFamily="18" charset="0"/>
-              </a:rPr>
-              <a:t>Сеттинг</a:t>
-            </a:r>
-            <a:r>
               <a:rPr lang="ru-RU" sz="2800" dirty="0" smtClean="0">
                 <a:latin typeface="Times New Roman" pitchFamily="18" charset="0"/>
                 <a:cs typeface="Times New Roman" pitchFamily="18" charset="0"/>
               </a:rPr>
-              <a:t> и сюжет</a:t>
+              <a:t>Сюжет</a:t>
             </a:r>
             <a:endParaRPr lang="ru-RU" sz="2800" dirty="0">
               <a:latin typeface="Times New Roman" pitchFamily="18" charset="0"/>
@@ -4247,8 +4264,8 @@
         </p:nvSpPr>
         <p:spPr>
           <a:xfrm>
-            <a:off x="457200" y="1600200"/>
-            <a:ext cx="8229600" cy="4853136"/>
+            <a:off x="3857624" y="1600200"/>
+            <a:ext cx="5106864" cy="4853136"/>
           </a:xfrm>
         </p:spPr>
         <p:txBody>
@@ -4258,81 +4275,18 @@
           <a:lstStyle/>
           <a:p>
             <a:r>
-              <a:rPr lang="ru-RU" sz="2000" b="1" dirty="0" err="1">
-                <a:latin typeface="Times New Roman" pitchFamily="18" charset="0"/>
-                <a:cs typeface="Times New Roman" pitchFamily="18" charset="0"/>
-              </a:rPr>
-              <a:t>Сеттинг</a:t>
-            </a:r>
-            <a:r>
-              <a:rPr lang="ru-RU" sz="2000" b="1" dirty="0">
-                <a:latin typeface="Times New Roman" pitchFamily="18" charset="0"/>
-                <a:cs typeface="Times New Roman" pitchFamily="18" charset="0"/>
-              </a:rPr>
-              <a:t>:</a:t>
+              <a:rPr lang="ru-RU" sz="2000" dirty="0" smtClean="0">
+                <a:latin typeface="Times New Roman" pitchFamily="18" charset="0"/>
+                <a:cs typeface="Times New Roman" pitchFamily="18" charset="0"/>
+              </a:rPr>
+              <a:t>Юная </a:t>
             </a:r>
             <a:r>
               <a:rPr lang="ru-RU" sz="2000" dirty="0">
                 <a:latin typeface="Times New Roman" pitchFamily="18" charset="0"/>
                 <a:cs typeface="Times New Roman" pitchFamily="18" charset="0"/>
               </a:rPr>
-              <a:t/>
-            </a:r>
-            <a:br>
-              <a:rPr lang="ru-RU" sz="2000" dirty="0">
-                <a:latin typeface="Times New Roman" pitchFamily="18" charset="0"/>
-                <a:cs typeface="Times New Roman" pitchFamily="18" charset="0"/>
-              </a:rPr>
-            </a:br>
-            <a:r>
-              <a:rPr lang="ru-RU" sz="2000" dirty="0">
-                <a:latin typeface="Times New Roman" pitchFamily="18" charset="0"/>
-                <a:cs typeface="Times New Roman" pitchFamily="18" charset="0"/>
-              </a:rPr>
-              <a:t>Действие происходит в запущенном поместье ведьмы Сабрины. Мир сочетает два полюса: уютный </a:t>
-            </a:r>
-            <a:r>
-              <a:rPr lang="ru-RU" sz="2000" dirty="0" smtClean="0">
-                <a:latin typeface="Times New Roman" pitchFamily="18" charset="0"/>
-                <a:cs typeface="Times New Roman" pitchFamily="18" charset="0"/>
-              </a:rPr>
-              <a:t>дом </a:t>
-            </a:r>
-            <a:r>
-              <a:rPr lang="ru-RU" sz="2000" dirty="0">
-                <a:latin typeface="Times New Roman" pitchFamily="18" charset="0"/>
-                <a:cs typeface="Times New Roman" pitchFamily="18" charset="0"/>
-              </a:rPr>
-              <a:t>с теплым свечным освещением и мрачный лес, который постепенно захватывает магическая «Гниль». Игрок находится в роли молодой ведьмы, восстанавливающей баланс природы.</a:t>
-            </a:r>
-          </a:p>
-          <a:p>
-            <a:r>
-              <a:rPr lang="ru-RU" sz="2000" b="1" dirty="0">
-                <a:latin typeface="Times New Roman" pitchFamily="18" charset="0"/>
-                <a:cs typeface="Times New Roman" pitchFamily="18" charset="0"/>
-              </a:rPr>
-              <a:t>Сюжет:</a:t>
-            </a:r>
-            <a:r>
-              <a:rPr lang="ru-RU" sz="2000" dirty="0">
-                <a:latin typeface="Times New Roman" pitchFamily="18" charset="0"/>
-                <a:cs typeface="Times New Roman" pitchFamily="18" charset="0"/>
-              </a:rPr>
-              <a:t/>
-            </a:r>
-            <a:br>
-              <a:rPr lang="ru-RU" sz="2000" dirty="0">
-                <a:latin typeface="Times New Roman" pitchFamily="18" charset="0"/>
-                <a:cs typeface="Times New Roman" pitchFamily="18" charset="0"/>
-              </a:rPr>
-            </a:br>
-            <a:r>
-              <a:rPr lang="ru-RU" sz="2000" dirty="0">
-                <a:latin typeface="Times New Roman" pitchFamily="18" charset="0"/>
-                <a:cs typeface="Times New Roman" pitchFamily="18" charset="0"/>
-              </a:rPr>
-              <a:t>Юная ведьма Агата получает в наследство дом покойной бабушки. Местные ведьмы считают, что Агата никогда не сможет стать такой же сильной, как ее покойная родственница. В это же время в лесу начинает появляться нечисть и Гниль. Пока их вред минимален, но опасность явно станет серьезнее в ближайшее время. Агате предстоит восстановить сад, заслужить уважение людей и ведьм, и найти собственный путь: стать тенью великой бабушки или обрести свою уникальную магию.</a:t>
+              <a:t>ведьма Агата получает в наследство дом покойной бабушки. Местные ведьмы считают, что Агата никогда не сможет стать такой же сильной, как ее покойная родственница. В это же время в лесу начинает появляться нечисть и Гниль. Пока их вред минимален, но опасность явно станет серьезнее в ближайшее время. Агате предстоит восстановить сад, заслужить уважение людей и ведьм, и найти собственный путь: стать тенью великой бабушки или обрести свою уникальную магию.</a:t>
             </a:r>
           </a:p>
           <a:p>
@@ -4343,6 +4297,47 @@
           </a:p>
         </p:txBody>
       </p:sp>
+      <p:pic>
+        <p:nvPicPr>
+          <p:cNvPr id="3076" name="Picture 4" descr="C:\Users\Sofiya\Downloads\jpg"/>
+          <p:cNvPicPr>
+            <a:picLocks noChangeAspect="1" noChangeArrowheads="1"/>
+          </p:cNvPicPr>
+          <p:nvPr/>
+        </p:nvPicPr>
+        <p:blipFill>
+          <a:blip r:embed="rId2">
+            <a:extLst>
+              <a:ext uri="{28A0092B-C50C-407E-A947-70E740481C1C}">
+                <a14:useLocalDpi xmlns:a14="http://schemas.microsoft.com/office/drawing/2010/main" val="0"/>
+              </a:ext>
+            </a:extLst>
+          </a:blip>
+          <a:srcRect/>
+          <a:stretch>
+            <a:fillRect/>
+          </a:stretch>
+        </p:blipFill>
+        <p:spPr bwMode="auto">
+          <a:xfrm>
+            <a:off x="0" y="0"/>
+            <a:ext cx="3857625" cy="6858000"/>
+          </a:xfrm>
+          <a:prstGeom prst="rect">
+            <a:avLst/>
+          </a:prstGeom>
+          <a:noFill/>
+          <a:extLst>
+            <a:ext uri="{909E8E84-426E-40DD-AFC4-6F175D3DCCD1}">
+              <a14:hiddenFill xmlns:a14="http://schemas.microsoft.com/office/drawing/2010/main">
+                <a:solidFill>
+                  <a:srgbClr val="FFFFFF"/>
+                </a:solidFill>
+              </a14:hiddenFill>
+            </a:ext>
+          </a:extLst>
+        </p:spPr>
+      </p:pic>
     </p:spTree>
     <p:extLst>
       <p:ext uri="{BB962C8B-B14F-4D97-AF65-F5344CB8AC3E}">
@@ -4470,8 +4465,19 @@
                 <a:latin typeface="Times New Roman" pitchFamily="18" charset="0"/>
                 <a:cs typeface="Times New Roman" pitchFamily="18" charset="0"/>
               </a:rPr>
-              <a:t>Ритуалы: очищение леса от Гнили через.</a:t>
-            </a:r>
+              <a:t>Ритуалы: очищение леса от </a:t>
+            </a:r>
+            <a:r>
+              <a:rPr lang="ru-RU" sz="2000" dirty="0" smtClean="0">
+                <a:latin typeface="Times New Roman" pitchFamily="18" charset="0"/>
+                <a:cs typeface="Times New Roman" pitchFamily="18" charset="0"/>
+              </a:rPr>
+              <a:t>Гнили.</a:t>
+            </a:r>
+            <a:endParaRPr lang="ru-RU" sz="2000" dirty="0">
+              <a:latin typeface="Times New Roman" pitchFamily="18" charset="0"/>
+              <a:cs typeface="Times New Roman" pitchFamily="18" charset="0"/>
+            </a:endParaRPr>
           </a:p>
         </p:txBody>
       </p:sp>
@@ -4545,21 +4551,159 @@
           <a:chExt cx="0" cy="0"/>
         </a:xfrm>
       </p:grpSpPr>
-      <p:sp>
-        <p:nvSpPr>
-          <p:cNvPr id="3" name="Объект 2"/>
-          <p:cNvSpPr>
-            <a:spLocks noGrp="1"/>
-          </p:cNvSpPr>
-          <p:nvPr>
-            <p:ph idx="1"/>
-          </p:nvPr>
+      <p:pic>
+        <p:nvPicPr>
+          <p:cNvPr id="1030" name="Picture 6" descr="C:\Users\Sofiya\Downloads\Bluebelle Dawn by Louis Neille in Micheldever Wood Hampshire England.jpg"/>
+          <p:cNvPicPr>
+            <a:picLocks noChangeAspect="1" noChangeArrowheads="1"/>
+          </p:cNvPicPr>
+          <p:nvPr/>
+        </p:nvPicPr>
+        <p:blipFill>
+          <a:blip r:embed="rId2">
+            <a:extLst>
+              <a:ext uri="{28A0092B-C50C-407E-A947-70E740481C1C}">
+                <a14:useLocalDpi xmlns:a14="http://schemas.microsoft.com/office/drawing/2010/main" val="0"/>
+              </a:ext>
+            </a:extLst>
+          </a:blip>
+          <a:srcRect/>
+          <a:stretch>
+            <a:fillRect/>
+          </a:stretch>
+        </p:blipFill>
+        <p:spPr bwMode="auto">
+          <a:xfrm>
+            <a:off x="-684584" y="-2945"/>
+            <a:ext cx="10322062" cy="6858000"/>
+          </a:xfrm>
+          <a:prstGeom prst="rect">
+            <a:avLst/>
+          </a:prstGeom>
+          <a:noFill/>
+          <a:extLst>
+            <a:ext uri="{909E8E84-426E-40DD-AFC4-6F175D3DCCD1}">
+              <a14:hiddenFill xmlns:a14="http://schemas.microsoft.com/office/drawing/2010/main">
+                <a:solidFill>
+                  <a:srgbClr val="FFFFFF"/>
+                </a:solidFill>
+              </a14:hiddenFill>
+            </a:ext>
+          </a:extLst>
+        </p:spPr>
+      </p:pic>
+      <p:sp>
+        <p:nvSpPr>
+          <p:cNvPr id="10" name="Скругленный прямоугольник 9"/>
+          <p:cNvSpPr/>
+          <p:nvPr/>
         </p:nvSpPr>
         <p:spPr>
           <a:xfrm>
-            <a:off x="467544" y="1450139"/>
-            <a:ext cx="8136904" cy="5433467"/>
+            <a:off x="251520" y="1196752"/>
+            <a:ext cx="8496944" cy="3096344"/>
           </a:xfrm>
+          <a:prstGeom prst="roundRect">
+            <a:avLst/>
+          </a:prstGeom>
+          <a:solidFill>
+            <a:schemeClr val="bg1"/>
+          </a:solidFill>
+          <a:ln>
+            <a:solidFill>
+              <a:schemeClr val="accent4"/>
+            </a:solidFill>
+          </a:ln>
+        </p:spPr>
+        <p:style>
+          <a:lnRef idx="2">
+            <a:schemeClr val="accent1">
+              <a:shade val="50000"/>
+            </a:schemeClr>
+          </a:lnRef>
+          <a:fillRef idx="1">
+            <a:schemeClr val="accent1"/>
+          </a:fillRef>
+          <a:effectRef idx="0">
+            <a:schemeClr val="accent1"/>
+          </a:effectRef>
+          <a:fontRef idx="minor">
+            <a:schemeClr val="lt1"/>
+          </a:fontRef>
+        </p:style>
+        <p:txBody>
+          <a:bodyPr rtlCol="0" anchor="ctr"/>
+          <a:lstStyle/>
+          <a:p>
+            <a:pPr algn="ctr"/>
+            <a:endParaRPr lang="ru-RU" b="1" dirty="0"/>
+          </a:p>
+        </p:txBody>
+      </p:sp>
+      <p:sp>
+        <p:nvSpPr>
+          <p:cNvPr id="9" name="Скругленный прямоугольник 8"/>
+          <p:cNvSpPr/>
+          <p:nvPr/>
+        </p:nvSpPr>
+        <p:spPr>
+          <a:xfrm>
+            <a:off x="2013875" y="116632"/>
+            <a:ext cx="4968552" cy="648072"/>
+          </a:xfrm>
+          <a:prstGeom prst="roundRect">
+            <a:avLst/>
+          </a:prstGeom>
+          <a:solidFill>
+            <a:schemeClr val="bg1"/>
+          </a:solidFill>
+          <a:ln>
+            <a:solidFill>
+              <a:schemeClr val="accent4"/>
+            </a:solidFill>
+          </a:ln>
+        </p:spPr>
+        <p:style>
+          <a:lnRef idx="2">
+            <a:schemeClr val="accent1">
+              <a:shade val="50000"/>
+            </a:schemeClr>
+          </a:lnRef>
+          <a:fillRef idx="1">
+            <a:schemeClr val="accent1"/>
+          </a:fillRef>
+          <a:effectRef idx="0">
+            <a:schemeClr val="accent1"/>
+          </a:effectRef>
+          <a:fontRef idx="minor">
+            <a:schemeClr val="lt1"/>
+          </a:fontRef>
+        </p:style>
+        <p:txBody>
+          <a:bodyPr rtlCol="0" anchor="ctr"/>
+          <a:lstStyle/>
+          <a:p>
+            <a:pPr algn="ctr"/>
+            <a:endParaRPr lang="ru-RU" b="1" dirty="0"/>
+          </a:p>
+        </p:txBody>
+      </p:sp>
+      <p:sp>
+        <p:nvSpPr>
+          <p:cNvPr id="3" name="Объект 2"/>
+          <p:cNvSpPr>
+            <a:spLocks noGrp="1"/>
+          </p:cNvSpPr>
+          <p:nvPr>
+            <p:ph idx="1"/>
+          </p:nvPr>
+        </p:nvSpPr>
+        <p:spPr>
+          <a:xfrm>
+            <a:off x="431540" y="1340768"/>
+            <a:ext cx="8280920" cy="2880319"/>
+          </a:xfrm>
+          <a:noFill/>
         </p:spPr>
         <p:txBody>
           <a:bodyPr>
@@ -4639,7 +4783,7 @@
         </p:nvSpPr>
         <p:spPr>
           <a:xfrm>
-            <a:off x="457200" y="274638"/>
+            <a:off x="454641" y="-171400"/>
             <a:ext cx="8229600" cy="1143000"/>
           </a:xfrm>
         </p:spPr>
@@ -4749,24 +4893,8 @@
                 <a:latin typeface="Times New Roman" pitchFamily="18" charset="0"/>
                 <a:cs typeface="Times New Roman" pitchFamily="18" charset="0"/>
               </a:rPr>
-              <a:t>Показать, что ценность человека (ведьмы) определяется не титулами предков или магической силой, а реальными делами и заботой об окружающих. Создать расслабляющий, но осмысленный игровой опыт, где рутина приносит радость, а ответственность за природу — не абстракция, а игровая механика</a:t>
-            </a:r>
-            <a:r>
-              <a:rPr lang="ru-RU" sz="2000" dirty="0" smtClean="0">
-                <a:latin typeface="Times New Roman" pitchFamily="18" charset="0"/>
-                <a:cs typeface="Times New Roman" pitchFamily="18" charset="0"/>
-              </a:rPr>
-              <a:t>.</a:t>
-            </a:r>
-            <a:endParaRPr lang="en-US" sz="2000" dirty="0" smtClean="0">
-              <a:latin typeface="Times New Roman" pitchFamily="18" charset="0"/>
-              <a:cs typeface="Times New Roman" pitchFamily="18" charset="0"/>
-            </a:endParaRPr>
-          </a:p>
-          <a:p>
-            <a:pPr marL="0" indent="0">
-              <a:buNone/>
-            </a:pPr>
+              <a:t>Показать, что ценность человека (ведьмы) определяется не титулами предков или внешним признанием, а реальными делами и заботой об окружающих. Создать расслабляющий, но осмысленный игровой опыт, где рутина приносит радость. А также подчеркнуть важность заботы о природе.</a:t>
+            </a:r>
             <a:endParaRPr lang="en-US" sz="2000" dirty="0">
               <a:latin typeface="Times New Roman" pitchFamily="18" charset="0"/>
               <a:cs typeface="Times New Roman" pitchFamily="18" charset="0"/>
@@ -4815,17 +4943,68 @@
                 <a:latin typeface="Times New Roman" pitchFamily="18" charset="0"/>
                 <a:cs typeface="Times New Roman" pitchFamily="18" charset="0"/>
               </a:rPr>
-              <a:t>Экологическая ответственность: лес — живой организм, требующий заботы (Гниль как метафора последствий бездействия).</a:t>
-            </a:r>
-          </a:p>
-          <a:p>
+              <a:t>Экологическая ответственность: лес </a:t>
+            </a:r>
+            <a:r>
+              <a:rPr lang="ru-RU" sz="2000" dirty="0"/>
+              <a:t>–</a:t>
+            </a:r>
             <a:r>
               <a:rPr lang="ru-RU" sz="2000" dirty="0" smtClean="0">
                 <a:latin typeface="Times New Roman" pitchFamily="18" charset="0"/>
                 <a:cs typeface="Times New Roman" pitchFamily="18" charset="0"/>
               </a:rPr>
-              <a:t>Доказательство ценности: Самоуважение не зависит от мнения других</a:t>
-            </a:r>
+              <a:t> живой организм, требующий заботы.</a:t>
+            </a:r>
+          </a:p>
+          <a:p>
+            <a:r>
+              <a:rPr lang="ru-RU" sz="2000" dirty="0" smtClean="0">
+                <a:latin typeface="Times New Roman" pitchFamily="18" charset="0"/>
+                <a:cs typeface="Times New Roman" pitchFamily="18" charset="0"/>
+              </a:rPr>
+              <a:t>Доказательство ценности: самоуважение не зависит от мнения других</a:t>
+            </a:r>
+          </a:p>
+          <a:p>
+            <a:r>
+              <a:rPr lang="ru-RU" sz="2000" dirty="0">
+                <a:latin typeface="Times New Roman" pitchFamily="18" charset="0"/>
+                <a:cs typeface="Times New Roman" pitchFamily="18" charset="0"/>
+              </a:rPr>
+              <a:t>Ответственность: </a:t>
+            </a:r>
+            <a:r>
+              <a:rPr lang="ru-RU" sz="2000" dirty="0" smtClean="0">
+                <a:latin typeface="Times New Roman" pitchFamily="18" charset="0"/>
+                <a:cs typeface="Times New Roman" pitchFamily="18" charset="0"/>
+              </a:rPr>
+              <a:t>признание своих ошибок и принятие несовершенства </a:t>
+            </a:r>
+            <a:r>
+              <a:rPr lang="ru-RU" sz="2000" dirty="0">
+                <a:latin typeface="Times New Roman" pitchFamily="18" charset="0"/>
+                <a:cs typeface="Times New Roman" pitchFamily="18" charset="0"/>
+              </a:rPr>
+              <a:t>как себя, так и тех, кого мы </a:t>
+            </a:r>
+            <a:r>
+              <a:rPr lang="ru-RU" sz="2000" dirty="0" smtClean="0">
+                <a:latin typeface="Times New Roman" pitchFamily="18" charset="0"/>
+                <a:cs typeface="Times New Roman" pitchFamily="18" charset="0"/>
+              </a:rPr>
+              <a:t>идеализируем.</a:t>
+            </a:r>
+            <a:endParaRPr lang="ru-RU" sz="2000" dirty="0">
+              <a:latin typeface="Times New Roman" pitchFamily="18" charset="0"/>
+              <a:cs typeface="Times New Roman" pitchFamily="18" charset="0"/>
+            </a:endParaRPr>
+          </a:p>
+          <a:p>
+            <a:endParaRPr lang="ru-RU" sz="2000" dirty="0" smtClean="0">
+              <a:latin typeface="Times New Roman" pitchFamily="18" charset="0"/>
+              <a:cs typeface="Times New Roman" pitchFamily="18" charset="0"/>
+            </a:endParaRPr>
           </a:p>
           <a:p>
             <a:endParaRPr lang="ru-RU" sz="2000" dirty="0">
@@ -4899,20 +5078,6 @@
                 <a:latin typeface="Times New Roman" pitchFamily="18" charset="0"/>
                 <a:cs typeface="Times New Roman" pitchFamily="18" charset="0"/>
               </a:rPr>
-              <a:t>Визуал</a:t>
-            </a:r>
-            <a:r>
-              <a:rPr lang="ru-RU" sz="2800" dirty="0" smtClean="0">
-                <a:latin typeface="Times New Roman" pitchFamily="18" charset="0"/>
-                <a:cs typeface="Times New Roman" pitchFamily="18" charset="0"/>
-              </a:rPr>
-              <a:t>. </a:t>
-            </a:r>
-            <a:r>
-              <a:rPr lang="ru-RU" sz="2800" dirty="0" err="1" smtClean="0">
-                <a:latin typeface="Times New Roman" pitchFamily="18" charset="0"/>
-                <a:cs typeface="Times New Roman" pitchFamily="18" charset="0"/>
-              </a:rPr>
               <a:t>Референсы</a:t>
             </a:r>
             <a:endParaRPr lang="ru-RU" sz="2800" dirty="0">
@@ -4943,35 +5108,107 @@
           <a:lstStyle/>
           <a:p>
             <a:r>
-              <a:rPr lang="ru-RU" sz="2000" dirty="0" smtClean="0">
-                <a:latin typeface="Times New Roman" pitchFamily="18" charset="0"/>
-                <a:cs typeface="Times New Roman" pitchFamily="18" charset="0"/>
-              </a:rPr>
-              <a:t>Фильмы: </a:t>
-            </a:r>
-            <a:r>
-              <a:rPr lang="ru-RU" sz="2000" i="1" dirty="0" smtClean="0">
-                <a:latin typeface="Times New Roman" pitchFamily="18" charset="0"/>
-                <a:cs typeface="Times New Roman" pitchFamily="18" charset="0"/>
-              </a:rPr>
-              <a:t>«Пикник у Висячей скалы»</a:t>
-            </a:r>
-            <a:r>
-              <a:rPr lang="ru-RU" sz="2000" dirty="0" smtClean="0">
+              <a:rPr lang="ru-RU" sz="2000" dirty="0">
+                <a:latin typeface="Times New Roman" pitchFamily="18" charset="0"/>
+                <a:cs typeface="Times New Roman" pitchFamily="18" charset="0"/>
+              </a:rPr>
+              <a:t>Фильмы: «Пикник у Висячей скалы», «Практическая магия».</a:t>
+            </a:r>
+          </a:p>
+          <a:p>
+            <a:r>
+              <a:rPr lang="ru-RU" sz="2000" dirty="0">
+                <a:latin typeface="Times New Roman" pitchFamily="18" charset="0"/>
+                <a:cs typeface="Times New Roman" pitchFamily="18" charset="0"/>
+              </a:rPr>
+              <a:t>Игры: </a:t>
+            </a:r>
+            <a:r>
+              <a:rPr lang="en-US" sz="2000" dirty="0" err="1">
+                <a:latin typeface="Times New Roman" pitchFamily="18" charset="0"/>
+                <a:cs typeface="Times New Roman" pitchFamily="18" charset="0"/>
+              </a:rPr>
+              <a:t>Stardew</a:t>
+            </a:r>
+            <a:r>
+              <a:rPr lang="en-US" sz="2000" dirty="0">
+                <a:latin typeface="Times New Roman" pitchFamily="18" charset="0"/>
+                <a:cs typeface="Times New Roman" pitchFamily="18" charset="0"/>
+              </a:rPr>
+              <a:t> Valley</a:t>
+            </a:r>
+            <a:r>
+              <a:rPr lang="ru-RU" sz="2000" dirty="0">
                 <a:latin typeface="Times New Roman" pitchFamily="18" charset="0"/>
                 <a:cs typeface="Times New Roman" pitchFamily="18" charset="0"/>
               </a:rPr>
               <a:t>, </a:t>
             </a:r>
             <a:r>
-              <a:rPr lang="ru-RU" sz="2000" i="1" dirty="0" smtClean="0">
-                <a:latin typeface="Times New Roman" pitchFamily="18" charset="0"/>
-                <a:cs typeface="Times New Roman" pitchFamily="18" charset="0"/>
-              </a:rPr>
-              <a:t>«Практическая магия»</a:t>
-            </a:r>
-            <a:r>
-              <a:rPr lang="ru-RU" sz="2000" dirty="0" smtClean="0">
+              <a:rPr lang="ru-RU" sz="2000" dirty="0" err="1">
+                <a:latin typeface="Times New Roman" pitchFamily="18" charset="0"/>
+                <a:cs typeface="Times New Roman" pitchFamily="18" charset="0"/>
+              </a:rPr>
+              <a:t>Wylde</a:t>
+            </a:r>
+            <a:r>
+              <a:rPr lang="ru-RU" sz="2000" dirty="0">
+                <a:latin typeface="Times New Roman" pitchFamily="18" charset="0"/>
+                <a:cs typeface="Times New Roman" pitchFamily="18" charset="0"/>
+              </a:rPr>
+              <a:t> </a:t>
+            </a:r>
+            <a:r>
+              <a:rPr lang="ru-RU" sz="2000" dirty="0" err="1">
+                <a:latin typeface="Times New Roman" pitchFamily="18" charset="0"/>
+                <a:cs typeface="Times New Roman" pitchFamily="18" charset="0"/>
+              </a:rPr>
+              <a:t>Flowers</a:t>
+            </a:r>
+            <a:r>
+              <a:rPr lang="ru-RU" sz="2000" dirty="0">
+                <a:latin typeface="Times New Roman" pitchFamily="18" charset="0"/>
+                <a:cs typeface="Times New Roman" pitchFamily="18" charset="0"/>
+              </a:rPr>
+              <a:t>, </a:t>
+            </a:r>
+            <a:r>
+              <a:rPr lang="en-US" sz="2000" dirty="0" err="1">
+                <a:latin typeface="Times New Roman" pitchFamily="18" charset="0"/>
+                <a:cs typeface="Times New Roman" pitchFamily="18" charset="0"/>
+              </a:rPr>
+              <a:t>Wytchwood</a:t>
+            </a:r>
+            <a:r>
+              <a:rPr lang="ru-RU" sz="2000" dirty="0">
+                <a:latin typeface="Times New Roman" pitchFamily="18" charset="0"/>
+                <a:cs typeface="Times New Roman" pitchFamily="18" charset="0"/>
+              </a:rPr>
+              <a:t>, </a:t>
+            </a:r>
+            <a:r>
+              <a:rPr lang="en-US" sz="2000" dirty="0">
+                <a:latin typeface="Times New Roman" pitchFamily="18" charset="0"/>
+                <a:cs typeface="Times New Roman" pitchFamily="18" charset="0"/>
+              </a:rPr>
+              <a:t>Sun Haven</a:t>
+            </a:r>
+            <a:r>
+              <a:rPr lang="ru-RU" sz="2000" dirty="0">
+                <a:latin typeface="Times New Roman" pitchFamily="18" charset="0"/>
+                <a:cs typeface="Times New Roman" pitchFamily="18" charset="0"/>
+              </a:rPr>
+              <a:t>, </a:t>
+            </a:r>
+            <a:r>
+              <a:rPr lang="en-US" sz="2000" dirty="0">
+                <a:latin typeface="Times New Roman" pitchFamily="18" charset="0"/>
+                <a:cs typeface="Times New Roman" pitchFamily="18" charset="0"/>
+              </a:rPr>
+              <a:t>The Cosmic Wheel Sisterhood</a:t>
+            </a:r>
+            <a:r>
+              <a:rPr lang="ru-RU" sz="2000" dirty="0">
                 <a:latin typeface="Times New Roman" pitchFamily="18" charset="0"/>
                 <a:cs typeface="Times New Roman" pitchFamily="18" charset="0"/>
               </a:rPr>
@@ -4980,107 +5217,21 @@
           </a:p>
           <a:p>
             <a:r>
-              <a:rPr lang="ru-RU" sz="2000" dirty="0" smtClean="0">
-                <a:latin typeface="Times New Roman" pitchFamily="18" charset="0"/>
-                <a:cs typeface="Times New Roman" pitchFamily="18" charset="0"/>
-              </a:rPr>
-              <a:t>Игры: </a:t>
-            </a:r>
-            <a:r>
-              <a:rPr lang="en-US" sz="2000" i="1" dirty="0" err="1" smtClean="0">
-                <a:latin typeface="Times New Roman" pitchFamily="18" charset="0"/>
-                <a:cs typeface="Times New Roman" pitchFamily="18" charset="0"/>
-              </a:rPr>
-              <a:t>Stardew</a:t>
-            </a:r>
-            <a:r>
-              <a:rPr lang="en-US" sz="2000" i="1" dirty="0" smtClean="0">
-                <a:latin typeface="Times New Roman" pitchFamily="18" charset="0"/>
-                <a:cs typeface="Times New Roman" pitchFamily="18" charset="0"/>
-              </a:rPr>
-              <a:t> Valley</a:t>
-            </a:r>
-            <a:r>
-              <a:rPr lang="en-US" sz="2000" dirty="0" smtClean="0">
-                <a:latin typeface="Times New Roman" pitchFamily="18" charset="0"/>
-                <a:cs typeface="Times New Roman" pitchFamily="18" charset="0"/>
-              </a:rPr>
-              <a:t> (</a:t>
-            </a:r>
-            <a:r>
-              <a:rPr lang="ru-RU" sz="2000" dirty="0" smtClean="0">
-                <a:latin typeface="Times New Roman" pitchFamily="18" charset="0"/>
-                <a:cs typeface="Times New Roman" pitchFamily="18" charset="0"/>
-              </a:rPr>
-              <a:t>фермерство), </a:t>
-            </a:r>
-            <a:r>
-              <a:rPr lang="en-US" sz="2000" i="1" dirty="0" err="1" smtClean="0">
-                <a:latin typeface="Times New Roman" pitchFamily="18" charset="0"/>
-                <a:cs typeface="Times New Roman" pitchFamily="18" charset="0"/>
-              </a:rPr>
-              <a:t>Wytchwood</a:t>
-            </a:r>
-            <a:r>
-              <a:rPr lang="en-US" sz="2000" dirty="0" smtClean="0">
-                <a:latin typeface="Times New Roman" pitchFamily="18" charset="0"/>
-                <a:cs typeface="Times New Roman" pitchFamily="18" charset="0"/>
-              </a:rPr>
-              <a:t> (</a:t>
-            </a:r>
-            <a:r>
-              <a:rPr lang="ru-RU" sz="2000" dirty="0" err="1" smtClean="0">
-                <a:latin typeface="Times New Roman" pitchFamily="18" charset="0"/>
-                <a:cs typeface="Times New Roman" pitchFamily="18" charset="0"/>
-              </a:rPr>
-              <a:t>крафт</a:t>
-            </a:r>
-            <a:r>
-              <a:rPr lang="ru-RU" sz="2000" dirty="0" smtClean="0">
-                <a:latin typeface="Times New Roman" pitchFamily="18" charset="0"/>
-                <a:cs typeface="Times New Roman" pitchFamily="18" charset="0"/>
-              </a:rPr>
-              <a:t>), </a:t>
-            </a:r>
-            <a:r>
-              <a:rPr lang="en-US" sz="2000" i="1" dirty="0" smtClean="0">
-                <a:latin typeface="Times New Roman" pitchFamily="18" charset="0"/>
-                <a:cs typeface="Times New Roman" pitchFamily="18" charset="0"/>
-              </a:rPr>
-              <a:t>The Cosmic Wheel Sisterhood</a:t>
-            </a:r>
-            <a:r>
-              <a:rPr lang="en-US" sz="2000" dirty="0" smtClean="0">
-                <a:latin typeface="Times New Roman" pitchFamily="18" charset="0"/>
-                <a:cs typeface="Times New Roman" pitchFamily="18" charset="0"/>
-              </a:rPr>
-              <a:t> (</a:t>
-            </a:r>
-            <a:r>
-              <a:rPr lang="ru-RU" sz="2000" dirty="0" smtClean="0">
-                <a:latin typeface="Times New Roman" pitchFamily="18" charset="0"/>
-                <a:cs typeface="Times New Roman" pitchFamily="18" charset="0"/>
-              </a:rPr>
-              <a:t>нарратив).</a:t>
-            </a:r>
-          </a:p>
-          <a:p>
-            <a:r>
-              <a:rPr lang="ru-RU" sz="2000" dirty="0" smtClean="0">
+              <a:rPr lang="ru-RU" sz="2000" dirty="0">
                 <a:latin typeface="Times New Roman" pitchFamily="18" charset="0"/>
                 <a:cs typeface="Times New Roman" pitchFamily="18" charset="0"/>
               </a:rPr>
               <a:t>Книги: Терри </a:t>
             </a:r>
             <a:r>
-              <a:rPr lang="ru-RU" sz="2000" dirty="0" err="1" smtClean="0">
+              <a:rPr lang="ru-RU" sz="2000" dirty="0" err="1">
                 <a:latin typeface="Times New Roman" pitchFamily="18" charset="0"/>
                 <a:cs typeface="Times New Roman" pitchFamily="18" charset="0"/>
               </a:rPr>
               <a:t>Пратчетт</a:t>
             </a:r>
             <a:r>
-              <a:rPr lang="ru-RU" sz="2000" dirty="0" smtClean="0">
+              <a:rPr lang="ru-RU" sz="2000" dirty="0">
                 <a:latin typeface="Times New Roman" pitchFamily="18" charset="0"/>
                 <a:cs typeface="Times New Roman" pitchFamily="18" charset="0"/>
               </a:rPr>
@@ -5233,8 +5384,8 @@
         </p:nvSpPr>
         <p:spPr>
           <a:xfrm>
-            <a:off x="457200" y="1340768"/>
-            <a:ext cx="8229600" cy="4785395"/>
+            <a:off x="457200" y="1196752"/>
+            <a:ext cx="8229600" cy="4929411"/>
           </a:xfrm>
         </p:spPr>
         <p:txBody>
@@ -5248,16 +5399,18 @@
                 <a:latin typeface="Times New Roman" pitchFamily="18" charset="0"/>
                 <a:cs typeface="Times New Roman" pitchFamily="18" charset="0"/>
               </a:rPr>
-              <a:t>Палитра: Землистые, болотные, тёмно-зелёные, бордовые оттенки в лесу / тёплые, жёлтые, свечные — в доме.</a:t>
-            </a:r>
-          </a:p>
-          <a:p>
+              <a:t>Палитра: Землистые, болотные, тёмно-зелёные, бордовые оттенки в лесу / тёплые, жёлтые, коричневые </a:t>
+            </a:r>
+            <a:r>
+              <a:rPr lang="ru-RU" sz="2000" dirty="0"/>
+              <a:t>–</a:t>
+            </a:r>
             <a:r>
               <a:rPr lang="ru-RU" sz="2000" dirty="0" smtClean="0">
                 <a:latin typeface="Times New Roman" pitchFamily="18" charset="0"/>
                 <a:cs typeface="Times New Roman" pitchFamily="18" charset="0"/>
               </a:rPr>
-              <a:t>Перспектива: 2D, вид сбоку (как если бы игрок стоял в комнате). Перемещение кликами мыши.</a:t>
+              <a:t> в доме.</a:t>
             </a:r>
           </a:p>
           <a:p>
@@ -5266,10 +5419,22 @@
                 <a:latin typeface="Times New Roman" pitchFamily="18" charset="0"/>
                 <a:cs typeface="Times New Roman" pitchFamily="18" charset="0"/>
               </a:rPr>
-              <a:t>Атмосфера: Игра света и теней (туман на полянах, мерцание свечей).</a:t>
-            </a:r>
-          </a:p>
-          <a:p>
+              <a:t>2</a:t>
+            </a:r>
+            <a:r>
+              <a:rPr lang="en-US" sz="2000" dirty="0" smtClean="0">
+                <a:latin typeface="Times New Roman" pitchFamily="18" charset="0"/>
+                <a:cs typeface="Times New Roman" pitchFamily="18" charset="0"/>
+              </a:rPr>
+              <a:t>D</a:t>
+            </a:r>
+            <a:r>
+              <a:rPr lang="ru-RU" sz="2000" dirty="0" smtClean="0">
+                <a:latin typeface="Times New Roman" pitchFamily="18" charset="0"/>
+                <a:cs typeface="Times New Roman" pitchFamily="18" charset="0"/>
+              </a:rPr>
+              <a:t>-рисовка с видом сбоку.</a:t>
+            </a:r>
             <a:endParaRPr lang="ru-RU" sz="2000" dirty="0">
               <a:latin typeface="Times New Roman" pitchFamily="18" charset="0"/>
               <a:cs typeface="Times New Roman" pitchFamily="18" charset="0"/>
@@ -5298,8 +5463,8 @@
         </p:blipFill>
         <p:spPr bwMode="auto">
           <a:xfrm>
-            <a:off x="1619672" y="3281989"/>
-            <a:ext cx="5940425" cy="3336290"/>
+            <a:off x="1624480" y="2852936"/>
+            <a:ext cx="6043863" cy="3552314"/>
           </a:xfrm>
           <a:prstGeom prst="rect">
             <a:avLst/>
